--- a/docs/content/ancova/ancova_lecture.pptx
+++ b/docs/content/ancova/ancova_lecture.pptx
@@ -8634,15 +8634,6 @@
               </a:rPr>
               <a:t>+</a:t>
             </a:r>
-            <a:r>
-              <a:rPr>
-                <a:solidFill>
-                  <a:srgbClr val="003B4F"/>
-                </a:solidFill>
-                <a:latin typeface="Courier"/>
-              </a:rPr>
-              <a:t> </a:t>
-            </a:r>
             <a:br/>
             <a:r>
               <a:rPr>
@@ -8959,6 +8950,19 @@
             <a:pPr lvl="0" indent="0" marL="0">
               <a:buNone/>
             </a:pPr>
+            <a:r>
+              <a:rPr/>
+              <a:t>A 2x2 panel comparing four ways to visualize ANCOVA results for the fruitfly data: raw data with regression lines by treatment, the same plot with a reference line at the mean covariate, adjusted means plotted as diamonds at the mean covariate, and a bar chart of adjusted means with confidence-interval error bars.</a:t>
+            </a:r>
+          </a:p>
+          <a:p>
+            <a:pPr lvl="0" indent="0" marL="0">
+              <a:buNone/>
+            </a:pPr>
+            <a:r>
+              <a:rPr/>
+              <a:t>A 2x2 panel comparing four ways to visualize ANCOVA results for the fruitfly data: raw data with regression lines by treatment, the same plot with a reference line at the mean covariate, adjusted means plotted as diamonds at the mean covariate, and a bar chart of adjusted means with confidence-interval error bars.</a:t>
+            </a:r>
           </a:p>
         </p:txBody>
       </p:sp>

--- a/docs/content/ancova/ancova_lecture.pptx
+++ b/docs/content/ancova/ancova_lecture.pptx
@@ -5697,6 +5697,16 @@
               </a:rPr>
               <a:t>(</a:t>
             </a:r>
+            <a:br/>
+            <a:r>
+              <a:rPr>
+                <a:solidFill>
+                  <a:srgbClr val="003B4F"/>
+                </a:solidFill>
+                <a:latin typeface="Courier"/>
+              </a:rPr>
+              <a:t>    </a:t>
+            </a:r>
             <a:r>
               <a:rPr>
                 <a:solidFill>
@@ -5713,7 +5723,17 @@
                 </a:solidFill>
                 <a:latin typeface="Courier"/>
               </a:rPr>
-              <a:t>, </a:t>
+              <a:t>,</a:t>
+            </a:r>
+            <a:br/>
+            <a:r>
+              <a:rPr>
+                <a:solidFill>
+                  <a:srgbClr val="003B4F"/>
+                </a:solidFill>
+                <a:latin typeface="Courier"/>
+              </a:rPr>
+              <a:t>    </a:t>
             </a:r>
             <a:r>
               <a:rPr>
@@ -5731,17 +5751,17 @@
                 </a:solidFill>
                 <a:latin typeface="Courier"/>
               </a:rPr>
-              <a:t>, </a:t>
-            </a:r>
-            <a:br/>
-            <a:r>
-              <a:rPr>
-                <a:solidFill>
-                  <a:srgbClr val="003B4F"/>
-                </a:solidFill>
-                <a:latin typeface="Courier"/>
-              </a:rPr>
-              <a:t>                   </a:t>
+              <a:t>,</a:t>
+            </a:r>
+            <a:br/>
+            <a:r>
+              <a:rPr>
+                <a:solidFill>
+                  <a:srgbClr val="003B4F"/>
+                </a:solidFill>
+                <a:latin typeface="Courier"/>
+              </a:rPr>
+              <a:t>    </a:t>
             </a:r>
             <a:r>
               <a:rPr>
@@ -5759,7 +5779,17 @@
                 </a:solidFill>
                 <a:latin typeface="Courier"/>
               </a:rPr>
-              <a:t>, </a:t>
+              <a:t>,</a:t>
+            </a:r>
+            <a:br/>
+            <a:r>
+              <a:rPr>
+                <a:solidFill>
+                  <a:srgbClr val="003B4F"/>
+                </a:solidFill>
+                <a:latin typeface="Courier"/>
+              </a:rPr>
+              <a:t>    </a:t>
             </a:r>
             <a:r>
               <a:rPr>
@@ -5770,14 +5800,15 @@
               </a:rPr>
               <a:t>""</a:t>
             </a:r>
-            <a:r>
-              <a:rPr>
-                <a:solidFill>
-                  <a:srgbClr val="003B4F"/>
-                </a:solidFill>
-                <a:latin typeface="Courier"/>
-              </a:rPr>
-              <a:t>),</a:t>
+            <a:br/>
+            <a:r>
+              <a:rPr>
+                <a:solidFill>
+                  <a:srgbClr val="003B4F"/>
+                </a:solidFill>
+                <a:latin typeface="Courier"/>
+              </a:rPr>
+              <a:t>  ),</a:t>
             </a:r>
             <a:br/>
             <a:r>
@@ -7331,6 +7362,16 @@
               </a:rPr>
               <a:t>)[</a:t>
             </a:r>
+            <a:br/>
+            <a:r>
+              <a:rPr>
+                <a:solidFill>
+                  <a:srgbClr val="003B4F"/>
+                </a:solidFill>
+                <a:latin typeface="Courier"/>
+              </a:rPr>
+              <a:t>  </a:t>
+            </a:r>
             <a:r>
               <a:rPr>
                 <a:solidFill>
@@ -7347,7 +7388,17 @@
                 </a:solidFill>
                 <a:latin typeface="Courier"/>
               </a:rPr>
-              <a:t>, </a:t>
+              <a:t>,</a:t>
+            </a:r>
+            <a:br/>
+            <a:r>
+              <a:rPr>
+                <a:solidFill>
+                  <a:srgbClr val="003B4F"/>
+                </a:solidFill>
+                <a:latin typeface="Courier"/>
+              </a:rPr>
+              <a:t>  </a:t>
             </a:r>
             <a:r>
               <a:rPr>
@@ -7358,6 +7409,7 @@
               </a:rPr>
               <a:t>"Pr(&gt;F)"</a:t>
             </a:r>
+            <a:br/>
             <a:r>
               <a:rPr>
                 <a:solidFill>
@@ -8662,6 +8714,16 @@
               </a:rPr>
               <a:t>(</a:t>
             </a:r>
+            <a:br/>
+            <a:r>
+              <a:rPr>
+                <a:solidFill>
+                  <a:srgbClr val="003B4F"/>
+                </a:solidFill>
+                <a:latin typeface="Courier"/>
+              </a:rPr>
+              <a:t>    </a:t>
+            </a:r>
             <a:r>
               <a:rPr>
                 <a:solidFill>
@@ -8706,7 +8768,7 @@
                 </a:solidFill>
                 <a:latin typeface="Courier"/>
               </a:rPr>
-              <a:t>       </a:t>
+              <a:t>    </a:t>
             </a:r>
             <a:r>
               <a:rPr>
@@ -8752,7 +8814,7 @@
                 </a:solidFill>
                 <a:latin typeface="Courier"/>
               </a:rPr>
-              <a:t>       </a:t>
+              <a:t>    </a:t>
             </a:r>
             <a:r>
               <a:rPr>
@@ -8781,14 +8843,15 @@
               </a:rPr>
               <a:t>"Treatment"</a:t>
             </a:r>
-            <a:r>
-              <a:rPr>
-                <a:solidFill>
-                  <a:srgbClr val="003B4F"/>
-                </a:solidFill>
-                <a:latin typeface="Courier"/>
-              </a:rPr>
-              <a:t>) </a:t>
+            <a:br/>
+            <a:r>
+              <a:rPr>
+                <a:solidFill>
+                  <a:srgbClr val="003B4F"/>
+                </a:solidFill>
+                <a:latin typeface="Courier"/>
+              </a:rPr>
+              <a:t>  ) </a:t>
             </a:r>
             <a:r>
               <a:rPr>
@@ -9557,296 +9620,19 @@
             </a:pPr>
             <a:r>
               <a:rPr>
-                <a:solidFill>
-                  <a:srgbClr val="003B4F"/>
-                </a:solidFill>
-                <a:latin typeface="Courier"/>
-              </a:rPr>
-              <a:t>    </a:t>
-            </a:r>
-            <a:r>
-              <a:rPr>
-                <a:solidFill>
-                  <a:srgbClr val="5E5E5E"/>
-                </a:solidFill>
-                <a:latin typeface="Courier"/>
-              </a:rPr>
-              <a:t>#| echo: false</a:t>
-            </a:r>
-            <a:br/>
-            <a:r>
-              <a:rPr>
-                <a:solidFill>
-                  <a:srgbClr val="003B4F"/>
-                </a:solidFill>
-                <a:latin typeface="Courier"/>
-              </a:rPr>
-              <a:t>    </a:t>
-            </a:r>
-            <a:r>
-              <a:rPr>
-                <a:solidFill>
-                  <a:srgbClr val="5E5E5E"/>
-                </a:solidFill>
-                <a:latin typeface="Courier"/>
-              </a:rPr>
-              <a:t># Fit model with interaction</a:t>
-            </a:r>
-            <a:br/>
-            <a:r>
-              <a:rPr>
-                <a:solidFill>
-                  <a:srgbClr val="003B4F"/>
-                </a:solidFill>
-                <a:latin typeface="Courier"/>
-              </a:rPr>
-              <a:t>    urchin_model &lt;- </a:t>
-            </a:r>
-            <a:r>
-              <a:rPr>
-                <a:solidFill>
-                  <a:srgbClr val="4758AB"/>
-                </a:solidFill>
-                <a:latin typeface="Courier"/>
-              </a:rPr>
-              <a:t>lm</a:t>
-            </a:r>
-            <a:r>
-              <a:rPr>
-                <a:solidFill>
-                  <a:srgbClr val="003B4F"/>
-                </a:solidFill>
-                <a:latin typeface="Courier"/>
-              </a:rPr>
-              <a:t>(suture_width </a:t>
-            </a:r>
-            <a:r>
-              <a:rPr>
-                <a:solidFill>
-                  <a:srgbClr val="5E5E5E"/>
-                </a:solidFill>
-                <a:latin typeface="Courier"/>
-              </a:rPr>
-              <a:t>~</a:t>
-            </a:r>
-            <a:r>
-              <a:rPr>
-                <a:solidFill>
-                  <a:srgbClr val="003B4F"/>
-                </a:solidFill>
-                <a:latin typeface="Courier"/>
-              </a:rPr>
-              <a:t> volume </a:t>
-            </a:r>
-            <a:r>
-              <a:rPr>
-                <a:solidFill>
-                  <a:srgbClr val="5E5E5E"/>
-                </a:solidFill>
-                <a:latin typeface="Courier"/>
-              </a:rPr>
-              <a:t>*</a:t>
-            </a:r>
-            <a:r>
-              <a:rPr>
-                <a:solidFill>
-                  <a:srgbClr val="003B4F"/>
-                </a:solidFill>
-                <a:latin typeface="Courier"/>
-              </a:rPr>
-              <a:t> treatment, </a:t>
-            </a:r>
-            <a:r>
-              <a:rPr>
-                <a:solidFill>
-                  <a:srgbClr val="657422"/>
-                </a:solidFill>
-                <a:latin typeface="Courier"/>
-              </a:rPr>
-              <a:t>data =</a:t>
-            </a:r>
-            <a:r>
-              <a:rPr>
-                <a:solidFill>
-                  <a:srgbClr val="003B4F"/>
-                </a:solidFill>
-                <a:latin typeface="Courier"/>
-              </a:rPr>
-              <a:t> urchin_data)</a:t>
-            </a:r>
-            <a:br/>
-            <a:r>
-              <a:rPr>
-                <a:solidFill>
-                  <a:srgbClr val="003B4F"/>
-                </a:solidFill>
-                <a:latin typeface="Courier"/>
-              </a:rPr>
-              <a:t>    </a:t>
-            </a:r>
-            <a:r>
-              <a:rPr>
-                <a:solidFill>
-                  <a:srgbClr val="4758AB"/>
-                </a:solidFill>
-                <a:latin typeface="Courier"/>
-              </a:rPr>
-              <a:t>Anova</a:t>
-            </a:r>
-            <a:r>
-              <a:rPr>
-                <a:solidFill>
-                  <a:srgbClr val="003B4F"/>
-                </a:solidFill>
-                <a:latin typeface="Courier"/>
-              </a:rPr>
-              <a:t>(urchin_model, </a:t>
-            </a:r>
-            <a:r>
-              <a:rPr>
-                <a:solidFill>
-                  <a:srgbClr val="657422"/>
-                </a:solidFill>
-                <a:latin typeface="Courier"/>
-              </a:rPr>
-              <a:t>type =</a:t>
-            </a:r>
-            <a:r>
-              <a:rPr>
-                <a:solidFill>
-                  <a:srgbClr val="003B4F"/>
-                </a:solidFill>
-                <a:latin typeface="Courier"/>
-              </a:rPr>
-              <a:t> </a:t>
-            </a:r>
-            <a:r>
-              <a:rPr>
-                <a:solidFill>
-                  <a:srgbClr val="AD0000"/>
-                </a:solidFill>
-                <a:latin typeface="Courier"/>
-              </a:rPr>
-              <a:t>3</a:t>
-            </a:r>
-            <a:r>
-              <a:rPr>
-                <a:solidFill>
-                  <a:srgbClr val="003B4F"/>
-                </a:solidFill>
-                <a:latin typeface="Courier"/>
-              </a:rPr>
-              <a:t>)</a:t>
-            </a:r>
-            <a:br/>
-            <a:r>
-              <a:rPr i="1">
-                <a:solidFill>
-                  <a:srgbClr val="5E5E5E"/>
-                </a:solidFill>
-                <a:latin typeface="Courier"/>
-              </a:rPr>
-              <a:t>## Anova Table (Type III tests)</a:t>
-            </a:r>
-            <a:br/>
-            <a:r>
-              <a:rPr i="1">
-                <a:solidFill>
-                  <a:srgbClr val="5E5E5E"/>
-                </a:solidFill>
-                <a:latin typeface="Courier"/>
-              </a:rPr>
-              <a:t>## </a:t>
-            </a:r>
-            <a:br/>
-            <a:r>
-              <a:rPr i="1">
-                <a:solidFill>
-                  <a:srgbClr val="5E5E5E"/>
-                </a:solidFill>
-                <a:latin typeface="Courier"/>
-              </a:rPr>
-              <a:t>## Response: suture_width</a:t>
-            </a:r>
-            <a:br/>
-            <a:r>
-              <a:rPr i="1">
-                <a:solidFill>
-                  <a:srgbClr val="5E5E5E"/>
-                </a:solidFill>
-                <a:latin typeface="Courier"/>
-              </a:rPr>
-              <a:t>##                     Sum Sq Df F value    Pr(&gt;F)    </a:t>
-            </a:r>
-            <a:br/>
-            <a:r>
-              <a:rPr i="1">
-                <a:solidFill>
-                  <a:srgbClr val="5E5E5E"/>
-                </a:solidFill>
-                <a:latin typeface="Courier"/>
-              </a:rPr>
-              <a:t>## (Intercept)      0.0093295  1  104.97 2.828e-15 ***</a:t>
-            </a:r>
-            <a:br/>
-            <a:r>
-              <a:rPr i="1">
-                <a:solidFill>
-                  <a:srgbClr val="5E5E5E"/>
-                </a:solidFill>
-                <a:latin typeface="Courier"/>
-              </a:rPr>
-              <a:t>## volume           0.0197876  1  222.63 &lt; 2.2e-16 ***</a:t>
-            </a:r>
-            <a:br/>
-            <a:r>
-              <a:rPr i="1">
-                <a:solidFill>
-                  <a:srgbClr val="5E5E5E"/>
-                </a:solidFill>
-                <a:latin typeface="Courier"/>
-              </a:rPr>
-              <a:t>## treatment        0.0020070  2   11.29 6.064e-05 ***</a:t>
-            </a:r>
-            <a:br/>
-            <a:r>
-              <a:rPr i="1">
-                <a:solidFill>
-                  <a:srgbClr val="5E5E5E"/>
-                </a:solidFill>
-                <a:latin typeface="Courier"/>
-              </a:rPr>
-              <a:t>## volume:treatment 0.0062129  2   34.95 4.453e-11 ***</a:t>
-            </a:r>
-            <a:br/>
-            <a:r>
-              <a:rPr i="1">
-                <a:solidFill>
-                  <a:srgbClr val="5E5E5E"/>
-                </a:solidFill>
-                <a:latin typeface="Courier"/>
-              </a:rPr>
-              <a:t>## Residuals        0.0058662 66                      </a:t>
-            </a:r>
-            <a:br/>
-            <a:r>
-              <a:rPr i="1">
-                <a:solidFill>
-                  <a:srgbClr val="5E5E5E"/>
-                </a:solidFill>
-                <a:latin typeface="Courier"/>
-              </a:rPr>
-              <a:t>## ---</a:t>
-            </a:r>
-            <a:br/>
-            <a:r>
-              <a:rPr i="1">
-                <a:solidFill>
-                  <a:srgbClr val="5E5E5E"/>
-                </a:solidFill>
-                <a:latin typeface="Courier"/>
-              </a:rPr>
-              <a:t>## Signif. codes:  0 '***' 0.001 '**' 0.01 '*' 0.05 '.' 0.1 ' ' 1</a:t>
+                <a:latin typeface="Courier"/>
+              </a:rPr>
+              <a:t>## Anova Table (Type III tests)
+## 
+## Response: suture_width
+##                     Sum Sq Df F value    Pr(&gt;F)    
+## (Intercept)      0.0093295  1  104.97 2.828e-15 ***
+## volume           0.0197876  1  222.63 &lt; 2.2e-16 ***
+## treatment        0.0020070  2   11.29 6.064e-05 ***
+## volume:treatment 0.0062129  2   34.95 4.453e-11 ***
+## Residuals        0.0058662 66                      
+## ---
+## Signif. codes:  0 '***' 0.001 '**' 0.01 '*' 0.05 '.' 0.1 ' ' 1</a:t>
             </a:r>
           </a:p>
         </p:txBody>
@@ -10658,7 +10444,17 @@
                 </a:solidFill>
                 <a:latin typeface="Courier"/>
               </a:rPr>
-              <a:t>(rank_LONGEV </a:t>
+              <a:t>(</a:t>
+            </a:r>
+            <a:br/>
+            <a:r>
+              <a:rPr>
+                <a:solidFill>
+                  <a:srgbClr val="003B4F"/>
+                </a:solidFill>
+                <a:latin typeface="Courier"/>
+              </a:rPr>
+              <a:t>  rank_LONGEV </a:t>
             </a:r>
             <a:r>
               <a:rPr>
@@ -10669,6 +10465,101 @@
               </a:rPr>
               <a:t>~</a:t>
             </a:r>
+            <a:br/>
+            <a:r>
+              <a:rPr>
+                <a:solidFill>
+                  <a:srgbClr val="003B4F"/>
+                </a:solidFill>
+                <a:latin typeface="Courier"/>
+              </a:rPr>
+              <a:t>    rank_THORAX </a:t>
+            </a:r>
+            <a:r>
+              <a:rPr>
+                <a:solidFill>
+                  <a:srgbClr val="5E5E5E"/>
+                </a:solidFill>
+                <a:latin typeface="Courier"/>
+              </a:rPr>
+              <a:t>+</a:t>
+            </a:r>
+            <a:r>
+              <a:rPr>
+                <a:solidFill>
+                  <a:srgbClr val="003B4F"/>
+                </a:solidFill>
+                <a:latin typeface="Courier"/>
+              </a:rPr>
+              <a:t> treatment,</a:t>
+            </a:r>
+            <a:br/>
+            <a:r>
+              <a:rPr>
+                <a:solidFill>
+                  <a:srgbClr val="003B4F"/>
+                </a:solidFill>
+                <a:latin typeface="Courier"/>
+              </a:rPr>
+              <a:t>  </a:t>
+            </a:r>
+            <a:r>
+              <a:rPr>
+                <a:solidFill>
+                  <a:srgbClr val="657422"/>
+                </a:solidFill>
+                <a:latin typeface="Courier"/>
+              </a:rPr>
+              <a:t>data =</a:t>
+            </a:r>
+            <a:r>
+              <a:rPr>
+                <a:solidFill>
+                  <a:srgbClr val="003B4F"/>
+                </a:solidFill>
+                <a:latin typeface="Courier"/>
+              </a:rPr>
+              <a:t> partridge</a:t>
+            </a:r>
+            <a:br/>
+            <a:r>
+              <a:rPr>
+                <a:solidFill>
+                  <a:srgbClr val="003B4F"/>
+                </a:solidFill>
+                <a:latin typeface="Courier"/>
+              </a:rPr>
+              <a:t>)</a:t>
+            </a:r>
+            <a:br/>
+            <a:br/>
+            <a:r>
+              <a:rPr>
+                <a:solidFill>
+                  <a:srgbClr val="4758AB"/>
+                </a:solidFill>
+                <a:latin typeface="Courier"/>
+              </a:rPr>
+              <a:t>Anova</a:t>
+            </a:r>
+            <a:r>
+              <a:rPr>
+                <a:solidFill>
+                  <a:srgbClr val="003B4F"/>
+                </a:solidFill>
+                <a:latin typeface="Courier"/>
+              </a:rPr>
+              <a:t>(rank_ancova, </a:t>
+            </a:r>
+            <a:r>
+              <a:rPr>
+                <a:solidFill>
+                  <a:srgbClr val="657422"/>
+                </a:solidFill>
+                <a:latin typeface="Courier"/>
+              </a:rPr>
+              <a:t>type =</a:t>
+            </a:r>
             <a:r>
               <a:rPr>
                 <a:solidFill>
@@ -10678,43 +10569,209 @@
               </a:rPr>
               <a:t> </a:t>
             </a:r>
-            <a:br/>
-            <a:r>
-              <a:rPr>
-                <a:solidFill>
-                  <a:srgbClr val="003B4F"/>
-                </a:solidFill>
-                <a:latin typeface="Courier"/>
-              </a:rPr>
-              <a:t>                  rank_THORAX </a:t>
-            </a:r>
-            <a:r>
-              <a:rPr>
+            <a:r>
+              <a:rPr>
+                <a:solidFill>
+                  <a:srgbClr val="20794D"/>
+                </a:solidFill>
+                <a:latin typeface="Courier"/>
+              </a:rPr>
+              <a:t>"III"</a:t>
+            </a:r>
+            <a:r>
+              <a:rPr>
+                <a:solidFill>
+                  <a:srgbClr val="003B4F"/>
+                </a:solidFill>
+                <a:latin typeface="Courier"/>
+              </a:rPr>
+              <a:t>)</a:t>
+            </a:r>
+            <a:br/>
+            <a:r>
+              <a:rPr i="1">
                 <a:solidFill>
                   <a:srgbClr val="5E5E5E"/>
                 </a:solidFill>
                 <a:latin typeface="Courier"/>
               </a:rPr>
-              <a:t>+</a:t>
-            </a:r>
-            <a:r>
-              <a:rPr>
-                <a:solidFill>
-                  <a:srgbClr val="003B4F"/>
-                </a:solidFill>
-                <a:latin typeface="Courier"/>
-              </a:rPr>
-              <a:t> treatment, </a:t>
-            </a:r>
-            <a:br/>
-            <a:r>
-              <a:rPr>
-                <a:solidFill>
-                  <a:srgbClr val="003B4F"/>
-                </a:solidFill>
-                <a:latin typeface="Courier"/>
-              </a:rPr>
-              <a:t>                </a:t>
+              <a:t>## Anova Table (Type III tests)</a:t>
+            </a:r>
+            <a:br/>
+            <a:r>
+              <a:rPr i="1">
+                <a:solidFill>
+                  <a:srgbClr val="5E5E5E"/>
+                </a:solidFill>
+                <a:latin typeface="Courier"/>
+              </a:rPr>
+              <a:t>## </a:t>
+            </a:r>
+            <a:br/>
+            <a:r>
+              <a:rPr i="1">
+                <a:solidFill>
+                  <a:srgbClr val="5E5E5E"/>
+                </a:solidFill>
+                <a:latin typeface="Courier"/>
+              </a:rPr>
+              <a:t>## Response: rank_LONGEV</a:t>
+            </a:r>
+            <a:br/>
+            <a:r>
+              <a:rPr i="1">
+                <a:solidFill>
+                  <a:srgbClr val="5E5E5E"/>
+                </a:solidFill>
+                <a:latin typeface="Courier"/>
+              </a:rPr>
+              <a:t>##             Sum Sq  Df F value    Pr(&gt;F)    </a:t>
+            </a:r>
+            <a:br/>
+            <a:r>
+              <a:rPr i="1">
+                <a:solidFill>
+                  <a:srgbClr val="5E5E5E"/>
+                </a:solidFill>
+                <a:latin typeface="Courier"/>
+              </a:rPr>
+              <a:t>## (Intercept)  18783   1  38.236 9.121e-09 ***</a:t>
+            </a:r>
+            <a:br/>
+            <a:r>
+              <a:rPr i="1">
+                <a:solidFill>
+                  <a:srgbClr val="5E5E5E"/>
+                </a:solidFill>
+                <a:latin typeface="Courier"/>
+              </a:rPr>
+              <a:t>## rank_THORAX  54314   1 110.564 &lt; 2.2e-16 ***</a:t>
+            </a:r>
+            <a:br/>
+            <a:r>
+              <a:rPr i="1">
+                <a:solidFill>
+                  <a:srgbClr val="5E5E5E"/>
+                </a:solidFill>
+                <a:latin typeface="Courier"/>
+              </a:rPr>
+              <a:t>## treatment    40447   4  20.584 6.536e-13 ***</a:t>
+            </a:r>
+            <a:br/>
+            <a:r>
+              <a:rPr i="1">
+                <a:solidFill>
+                  <a:srgbClr val="5E5E5E"/>
+                </a:solidFill>
+                <a:latin typeface="Courier"/>
+              </a:rPr>
+              <a:t>## Residuals    58458 119                      </a:t>
+            </a:r>
+            <a:br/>
+            <a:r>
+              <a:rPr i="1">
+                <a:solidFill>
+                  <a:srgbClr val="5E5E5E"/>
+                </a:solidFill>
+                <a:latin typeface="Courier"/>
+              </a:rPr>
+              <a:t>## ---</a:t>
+            </a:r>
+            <a:br/>
+            <a:r>
+              <a:rPr i="1">
+                <a:solidFill>
+                  <a:srgbClr val="5E5E5E"/>
+                </a:solidFill>
+                <a:latin typeface="Courier"/>
+              </a:rPr>
+              <a:t>## Signif. codes:  0 '***' 0.001 '**' 0.01 '*' 0.05 '.' 0.1 ' ' 1</a:t>
+            </a:r>
+            <a:br/>
+            <a:br/>
+            <a:r>
+              <a:rPr>
+                <a:solidFill>
+                  <a:srgbClr val="5E5E5E"/>
+                </a:solidFill>
+                <a:latin typeface="Courier"/>
+              </a:rPr>
+              <a:t># Compare p-values for treatment effect</a:t>
+            </a:r>
+            <a:br/>
+            <a:r>
+              <a:rPr>
+                <a:solidFill>
+                  <a:srgbClr val="4758AB"/>
+                </a:solidFill>
+                <a:latin typeface="Courier"/>
+              </a:rPr>
+              <a:t>cat</a:t>
+            </a:r>
+            <a:r>
+              <a:rPr>
+                <a:solidFill>
+                  <a:srgbClr val="003B4F"/>
+                </a:solidFill>
+                <a:latin typeface="Courier"/>
+              </a:rPr>
+              <a:t>(</a:t>
+            </a:r>
+            <a:br/>
+            <a:r>
+              <a:rPr>
+                <a:solidFill>
+                  <a:srgbClr val="003B4F"/>
+                </a:solidFill>
+                <a:latin typeface="Courier"/>
+              </a:rPr>
+              <a:t>  </a:t>
+            </a:r>
+            <a:r>
+              <a:rPr>
+                <a:solidFill>
+                  <a:srgbClr val="20794D"/>
+                </a:solidFill>
+                <a:latin typeface="Courier"/>
+              </a:rPr>
+              <a:t>"P-value (parametric):"</a:t>
+            </a:r>
+            <a:r>
+              <a:rPr>
+                <a:solidFill>
+                  <a:srgbClr val="003B4F"/>
+                </a:solidFill>
+                <a:latin typeface="Courier"/>
+              </a:rPr>
+              <a:t>,</a:t>
+            </a:r>
+            <a:br/>
+            <a:r>
+              <a:rPr>
+                <a:solidFill>
+                  <a:srgbClr val="003B4F"/>
+                </a:solidFill>
+                <a:latin typeface="Courier"/>
+              </a:rPr>
+              <a:t>  </a:t>
+            </a:r>
+            <a:r>
+              <a:rPr>
+                <a:solidFill>
+                  <a:srgbClr val="4758AB"/>
+                </a:solidFill>
+                <a:latin typeface="Courier"/>
+              </a:rPr>
+              <a:t>Anova</a:t>
+            </a:r>
+            <a:r>
+              <a:rPr>
+                <a:solidFill>
+                  <a:srgbClr val="003B4F"/>
+                </a:solidFill>
+                <a:latin typeface="Courier"/>
+              </a:rPr>
+              <a:t>(ancova_model, </a:t>
             </a:r>
             <a:r>
               <a:rPr>
@@ -10723,18 +10780,128 @@
                 </a:solidFill>
                 <a:latin typeface="Courier"/>
               </a:rPr>
-              <a:t>data =</a:t>
-            </a:r>
-            <a:r>
-              <a:rPr>
-                <a:solidFill>
-                  <a:srgbClr val="003B4F"/>
-                </a:solidFill>
-                <a:latin typeface="Courier"/>
-              </a:rPr>
-              <a:t> partridge)</a:t>
-            </a:r>
-            <a:br/>
+              <a:t>type =</a:t>
+            </a:r>
+            <a:r>
+              <a:rPr>
+                <a:solidFill>
+                  <a:srgbClr val="003B4F"/>
+                </a:solidFill>
+                <a:latin typeface="Courier"/>
+              </a:rPr>
+              <a:t> </a:t>
+            </a:r>
+            <a:r>
+              <a:rPr>
+                <a:solidFill>
+                  <a:srgbClr val="20794D"/>
+                </a:solidFill>
+                <a:latin typeface="Courier"/>
+              </a:rPr>
+              <a:t>"III"</a:t>
+            </a:r>
+            <a:r>
+              <a:rPr>
+                <a:solidFill>
+                  <a:srgbClr val="003B4F"/>
+                </a:solidFill>
+                <a:latin typeface="Courier"/>
+              </a:rPr>
+              <a:t>)[</a:t>
+            </a:r>
+            <a:r>
+              <a:rPr>
+                <a:solidFill>
+                  <a:srgbClr val="20794D"/>
+                </a:solidFill>
+                <a:latin typeface="Courier"/>
+              </a:rPr>
+              <a:t>"treatment"</a:t>
+            </a:r>
+            <a:r>
+              <a:rPr>
+                <a:solidFill>
+                  <a:srgbClr val="003B4F"/>
+                </a:solidFill>
+                <a:latin typeface="Courier"/>
+              </a:rPr>
+              <a:t>, </a:t>
+            </a:r>
+            <a:r>
+              <a:rPr>
+                <a:solidFill>
+                  <a:srgbClr val="20794D"/>
+                </a:solidFill>
+                <a:latin typeface="Courier"/>
+              </a:rPr>
+              <a:t>"Pr(&gt;F)"</a:t>
+            </a:r>
+            <a:r>
+              <a:rPr>
+                <a:solidFill>
+                  <a:srgbClr val="003B4F"/>
+                </a:solidFill>
+                <a:latin typeface="Courier"/>
+              </a:rPr>
+              <a:t>],</a:t>
+            </a:r>
+            <a:br/>
+            <a:r>
+              <a:rPr>
+                <a:solidFill>
+                  <a:srgbClr val="003B4F"/>
+                </a:solidFill>
+                <a:latin typeface="Courier"/>
+              </a:rPr>
+              <a:t>  </a:t>
+            </a:r>
+            <a:r>
+              <a:rPr>
+                <a:solidFill>
+                  <a:srgbClr val="20794D"/>
+                </a:solidFill>
+                <a:latin typeface="Courier"/>
+              </a:rPr>
+              <a:t>"</a:t>
+            </a:r>
+            <a:r>
+              <a:rPr>
+                <a:solidFill>
+                  <a:srgbClr val="5E5E5E"/>
+                </a:solidFill>
+                <a:latin typeface="Courier"/>
+              </a:rPr>
+              <a:t>\n</a:t>
+            </a:r>
+            <a:r>
+              <a:rPr>
+                <a:solidFill>
+                  <a:srgbClr val="20794D"/>
+                </a:solidFill>
+                <a:latin typeface="Courier"/>
+              </a:rPr>
+              <a:t>"</a:t>
+            </a:r>
+            <a:br/>
+            <a:r>
+              <a:rPr>
+                <a:solidFill>
+                  <a:srgbClr val="003B4F"/>
+                </a:solidFill>
+                <a:latin typeface="Courier"/>
+              </a:rPr>
+              <a:t>)</a:t>
+            </a:r>
+            <a:br/>
+            <a:r>
+              <a:rPr i="1">
+                <a:solidFill>
+                  <a:srgbClr val="5E5E5E"/>
+                </a:solidFill>
+                <a:latin typeface="Courier"/>
+              </a:rPr>
+              <a:t>## P-value (parametric): 1.719359e-13</a:t>
+            </a:r>
             <a:br/>
             <a:r>
               <a:rPr>
@@ -10743,6 +10910,62 @@
                 </a:solidFill>
                 <a:latin typeface="Courier"/>
               </a:rPr>
+              <a:t>cat</a:t>
+            </a:r>
+            <a:r>
+              <a:rPr>
+                <a:solidFill>
+                  <a:srgbClr val="003B4F"/>
+                </a:solidFill>
+                <a:latin typeface="Courier"/>
+              </a:rPr>
+              <a:t>(</a:t>
+            </a:r>
+            <a:br/>
+            <a:r>
+              <a:rPr>
+                <a:solidFill>
+                  <a:srgbClr val="003B4F"/>
+                </a:solidFill>
+                <a:latin typeface="Courier"/>
+              </a:rPr>
+              <a:t>  </a:t>
+            </a:r>
+            <a:r>
+              <a:rPr>
+                <a:solidFill>
+                  <a:srgbClr val="20794D"/>
+                </a:solidFill>
+                <a:latin typeface="Courier"/>
+              </a:rPr>
+              <a:t>"P-value (rank-based):"</a:t>
+            </a:r>
+            <a:r>
+              <a:rPr>
+                <a:solidFill>
+                  <a:srgbClr val="003B4F"/>
+                </a:solidFill>
+                <a:latin typeface="Courier"/>
+              </a:rPr>
+              <a:t>,</a:t>
+            </a:r>
+            <a:br/>
+            <a:r>
+              <a:rPr>
+                <a:solidFill>
+                  <a:srgbClr val="003B4F"/>
+                </a:solidFill>
+                <a:latin typeface="Courier"/>
+              </a:rPr>
+              <a:t>  </a:t>
+            </a:r>
+            <a:r>
+              <a:rPr>
+                <a:solidFill>
+                  <a:srgbClr val="4758AB"/>
+                </a:solidFill>
+                <a:latin typeface="Courier"/>
+              </a:rPr>
               <a:t>Anova</a:t>
             </a:r>
             <a:r>
@@ -10788,420 +11011,53 @@
                 </a:solidFill>
                 <a:latin typeface="Courier"/>
               </a:rPr>
+              <a:t>)[</a:t>
+            </a:r>
+            <a:r>
+              <a:rPr>
+                <a:solidFill>
+                  <a:srgbClr val="20794D"/>
+                </a:solidFill>
+                <a:latin typeface="Courier"/>
+              </a:rPr>
+              <a:t>"treatment"</a:t>
+            </a:r>
+            <a:r>
+              <a:rPr>
+                <a:solidFill>
+                  <a:srgbClr val="003B4F"/>
+                </a:solidFill>
+                <a:latin typeface="Courier"/>
+              </a:rPr>
+              <a:t>, </a:t>
+            </a:r>
+            <a:r>
+              <a:rPr>
+                <a:solidFill>
+                  <a:srgbClr val="20794D"/>
+                </a:solidFill>
+                <a:latin typeface="Courier"/>
+              </a:rPr>
+              <a:t>"Pr(&gt;F)"</a:t>
+            </a:r>
+            <a:r>
+              <a:rPr>
+                <a:solidFill>
+                  <a:srgbClr val="003B4F"/>
+                </a:solidFill>
+                <a:latin typeface="Courier"/>
+              </a:rPr>
+              <a:t>]</a:t>
+            </a:r>
+            <a:br/>
+            <a:r>
+              <a:rPr>
+                <a:solidFill>
+                  <a:srgbClr val="003B4F"/>
+                </a:solidFill>
+                <a:latin typeface="Courier"/>
+              </a:rPr>
               <a:t>)</a:t>
-            </a:r>
-            <a:br/>
-            <a:r>
-              <a:rPr i="1">
-                <a:solidFill>
-                  <a:srgbClr val="5E5E5E"/>
-                </a:solidFill>
-                <a:latin typeface="Courier"/>
-              </a:rPr>
-              <a:t>## Anova Table (Type III tests)</a:t>
-            </a:r>
-            <a:br/>
-            <a:r>
-              <a:rPr i="1">
-                <a:solidFill>
-                  <a:srgbClr val="5E5E5E"/>
-                </a:solidFill>
-                <a:latin typeface="Courier"/>
-              </a:rPr>
-              <a:t>## </a:t>
-            </a:r>
-            <a:br/>
-            <a:r>
-              <a:rPr i="1">
-                <a:solidFill>
-                  <a:srgbClr val="5E5E5E"/>
-                </a:solidFill>
-                <a:latin typeface="Courier"/>
-              </a:rPr>
-              <a:t>## Response: rank_LONGEV</a:t>
-            </a:r>
-            <a:br/>
-            <a:r>
-              <a:rPr i="1">
-                <a:solidFill>
-                  <a:srgbClr val="5E5E5E"/>
-                </a:solidFill>
-                <a:latin typeface="Courier"/>
-              </a:rPr>
-              <a:t>##             Sum Sq  Df F value    Pr(&gt;F)    </a:t>
-            </a:r>
-            <a:br/>
-            <a:r>
-              <a:rPr i="1">
-                <a:solidFill>
-                  <a:srgbClr val="5E5E5E"/>
-                </a:solidFill>
-                <a:latin typeface="Courier"/>
-              </a:rPr>
-              <a:t>## (Intercept)  18783   1  38.236 9.121e-09 ***</a:t>
-            </a:r>
-            <a:br/>
-            <a:r>
-              <a:rPr i="1">
-                <a:solidFill>
-                  <a:srgbClr val="5E5E5E"/>
-                </a:solidFill>
-                <a:latin typeface="Courier"/>
-              </a:rPr>
-              <a:t>## rank_THORAX  54314   1 110.564 &lt; 2.2e-16 ***</a:t>
-            </a:r>
-            <a:br/>
-            <a:r>
-              <a:rPr i="1">
-                <a:solidFill>
-                  <a:srgbClr val="5E5E5E"/>
-                </a:solidFill>
-                <a:latin typeface="Courier"/>
-              </a:rPr>
-              <a:t>## treatment    40447   4  20.584 6.536e-13 ***</a:t>
-            </a:r>
-            <a:br/>
-            <a:r>
-              <a:rPr i="1">
-                <a:solidFill>
-                  <a:srgbClr val="5E5E5E"/>
-                </a:solidFill>
-                <a:latin typeface="Courier"/>
-              </a:rPr>
-              <a:t>## Residuals    58458 119                      </a:t>
-            </a:r>
-            <a:br/>
-            <a:r>
-              <a:rPr i="1">
-                <a:solidFill>
-                  <a:srgbClr val="5E5E5E"/>
-                </a:solidFill>
-                <a:latin typeface="Courier"/>
-              </a:rPr>
-              <a:t>## ---</a:t>
-            </a:r>
-            <a:br/>
-            <a:r>
-              <a:rPr i="1">
-                <a:solidFill>
-                  <a:srgbClr val="5E5E5E"/>
-                </a:solidFill>
-                <a:latin typeface="Courier"/>
-              </a:rPr>
-              <a:t>## Signif. codes:  0 '***' 0.001 '**' 0.01 '*' 0.05 '.' 0.1 ' ' 1</a:t>
-            </a:r>
-            <a:br/>
-            <a:br/>
-            <a:r>
-              <a:rPr>
-                <a:solidFill>
-                  <a:srgbClr val="5E5E5E"/>
-                </a:solidFill>
-                <a:latin typeface="Courier"/>
-              </a:rPr>
-              <a:t># Compare p-values for treatment effect</a:t>
-            </a:r>
-            <a:br/>
-            <a:r>
-              <a:rPr>
-                <a:solidFill>
-                  <a:srgbClr val="4758AB"/>
-                </a:solidFill>
-                <a:latin typeface="Courier"/>
-              </a:rPr>
-              <a:t>cat</a:t>
-            </a:r>
-            <a:r>
-              <a:rPr>
-                <a:solidFill>
-                  <a:srgbClr val="003B4F"/>
-                </a:solidFill>
-                <a:latin typeface="Courier"/>
-              </a:rPr>
-              <a:t>(</a:t>
-            </a:r>
-            <a:r>
-              <a:rPr>
-                <a:solidFill>
-                  <a:srgbClr val="20794D"/>
-                </a:solidFill>
-                <a:latin typeface="Courier"/>
-              </a:rPr>
-              <a:t>"P-value (parametric):"</a:t>
-            </a:r>
-            <a:r>
-              <a:rPr>
-                <a:solidFill>
-                  <a:srgbClr val="003B4F"/>
-                </a:solidFill>
-                <a:latin typeface="Courier"/>
-              </a:rPr>
-              <a:t>, </a:t>
-            </a:r>
-            <a:br/>
-            <a:r>
-              <a:rPr>
-                <a:solidFill>
-                  <a:srgbClr val="003B4F"/>
-                </a:solidFill>
-                <a:latin typeface="Courier"/>
-              </a:rPr>
-              <a:t>   </a:t>
-            </a:r>
-            <a:r>
-              <a:rPr>
-                <a:solidFill>
-                  <a:srgbClr val="4758AB"/>
-                </a:solidFill>
-                <a:latin typeface="Courier"/>
-              </a:rPr>
-              <a:t>Anova</a:t>
-            </a:r>
-            <a:r>
-              <a:rPr>
-                <a:solidFill>
-                  <a:srgbClr val="003B4F"/>
-                </a:solidFill>
-                <a:latin typeface="Courier"/>
-              </a:rPr>
-              <a:t>(ancova_model, </a:t>
-            </a:r>
-            <a:r>
-              <a:rPr>
-                <a:solidFill>
-                  <a:srgbClr val="657422"/>
-                </a:solidFill>
-                <a:latin typeface="Courier"/>
-              </a:rPr>
-              <a:t>type=</a:t>
-            </a:r>
-            <a:r>
-              <a:rPr>
-                <a:solidFill>
-                  <a:srgbClr val="20794D"/>
-                </a:solidFill>
-                <a:latin typeface="Courier"/>
-              </a:rPr>
-              <a:t>"III"</a:t>
-            </a:r>
-            <a:r>
-              <a:rPr>
-                <a:solidFill>
-                  <a:srgbClr val="003B4F"/>
-                </a:solidFill>
-                <a:latin typeface="Courier"/>
-              </a:rPr>
-              <a:t>)[</a:t>
-            </a:r>
-            <a:r>
-              <a:rPr>
-                <a:solidFill>
-                  <a:srgbClr val="20794D"/>
-                </a:solidFill>
-                <a:latin typeface="Courier"/>
-              </a:rPr>
-              <a:t>"treatment"</a:t>
-            </a:r>
-            <a:r>
-              <a:rPr>
-                <a:solidFill>
-                  <a:srgbClr val="003B4F"/>
-                </a:solidFill>
-                <a:latin typeface="Courier"/>
-              </a:rPr>
-              <a:t>, </a:t>
-            </a:r>
-            <a:r>
-              <a:rPr>
-                <a:solidFill>
-                  <a:srgbClr val="20794D"/>
-                </a:solidFill>
-                <a:latin typeface="Courier"/>
-              </a:rPr>
-              <a:t>"Pr(&gt;F)"</a:t>
-            </a:r>
-            <a:r>
-              <a:rPr>
-                <a:solidFill>
-                  <a:srgbClr val="003B4F"/>
-                </a:solidFill>
-                <a:latin typeface="Courier"/>
-              </a:rPr>
-              <a:t>],  </a:t>
-            </a:r>
-            <a:r>
-              <a:rPr>
-                <a:solidFill>
-                  <a:srgbClr val="20794D"/>
-                </a:solidFill>
-                <a:latin typeface="Courier"/>
-              </a:rPr>
-              <a:t>"</a:t>
-            </a:r>
-            <a:r>
-              <a:rPr>
-                <a:solidFill>
-                  <a:srgbClr val="5E5E5E"/>
-                </a:solidFill>
-                <a:latin typeface="Courier"/>
-              </a:rPr>
-              <a:t>\n</a:t>
-            </a:r>
-            <a:r>
-              <a:rPr>
-                <a:solidFill>
-                  <a:srgbClr val="20794D"/>
-                </a:solidFill>
-                <a:latin typeface="Courier"/>
-              </a:rPr>
-              <a:t>"</a:t>
-            </a:r>
-            <a:r>
-              <a:rPr>
-                <a:solidFill>
-                  <a:srgbClr val="003B4F"/>
-                </a:solidFill>
-                <a:latin typeface="Courier"/>
-              </a:rPr>
-              <a:t>)</a:t>
-            </a:r>
-            <a:br/>
-            <a:r>
-              <a:rPr i="1">
-                <a:solidFill>
-                  <a:srgbClr val="5E5E5E"/>
-                </a:solidFill>
-                <a:latin typeface="Courier"/>
-              </a:rPr>
-              <a:t>## P-value (parametric): 1.719359e-13</a:t>
-            </a:r>
-            <a:br/>
-            <a:r>
-              <a:rPr>
-                <a:solidFill>
-                  <a:srgbClr val="4758AB"/>
-                </a:solidFill>
-                <a:latin typeface="Courier"/>
-              </a:rPr>
-              <a:t>cat</a:t>
-            </a:r>
-            <a:r>
-              <a:rPr>
-                <a:solidFill>
-                  <a:srgbClr val="003B4F"/>
-                </a:solidFill>
-                <a:latin typeface="Courier"/>
-              </a:rPr>
-              <a:t>(</a:t>
-            </a:r>
-            <a:r>
-              <a:rPr>
-                <a:solidFill>
-                  <a:srgbClr val="20794D"/>
-                </a:solidFill>
-                <a:latin typeface="Courier"/>
-              </a:rPr>
-              <a:t>"P-value (rank-based):"</a:t>
-            </a:r>
-            <a:r>
-              <a:rPr>
-                <a:solidFill>
-                  <a:srgbClr val="003B4F"/>
-                </a:solidFill>
-                <a:latin typeface="Courier"/>
-              </a:rPr>
-              <a:t>, </a:t>
-            </a:r>
-            <a:br/>
-            <a:r>
-              <a:rPr>
-                <a:solidFill>
-                  <a:srgbClr val="003B4F"/>
-                </a:solidFill>
-                <a:latin typeface="Courier"/>
-              </a:rPr>
-              <a:t>    </a:t>
-            </a:r>
-            <a:r>
-              <a:rPr>
-                <a:solidFill>
-                  <a:srgbClr val="4758AB"/>
-                </a:solidFill>
-                <a:latin typeface="Courier"/>
-              </a:rPr>
-              <a:t>Anova</a:t>
-            </a:r>
-            <a:r>
-              <a:rPr>
-                <a:solidFill>
-                  <a:srgbClr val="003B4F"/>
-                </a:solidFill>
-                <a:latin typeface="Courier"/>
-              </a:rPr>
-              <a:t>(rank_ancova, </a:t>
-            </a:r>
-            <a:r>
-              <a:rPr>
-                <a:solidFill>
-                  <a:srgbClr val="657422"/>
-                </a:solidFill>
-                <a:latin typeface="Courier"/>
-              </a:rPr>
-              <a:t>type=</a:t>
-            </a:r>
-            <a:r>
-              <a:rPr>
-                <a:solidFill>
-                  <a:srgbClr val="20794D"/>
-                </a:solidFill>
-                <a:latin typeface="Courier"/>
-              </a:rPr>
-              <a:t>"III"</a:t>
-            </a:r>
-            <a:r>
-              <a:rPr>
-                <a:solidFill>
-                  <a:srgbClr val="003B4F"/>
-                </a:solidFill>
-                <a:latin typeface="Courier"/>
-              </a:rPr>
-              <a:t>)[</a:t>
-            </a:r>
-            <a:r>
-              <a:rPr>
-                <a:solidFill>
-                  <a:srgbClr val="20794D"/>
-                </a:solidFill>
-                <a:latin typeface="Courier"/>
-              </a:rPr>
-              <a:t>"treatment"</a:t>
-            </a:r>
-            <a:r>
-              <a:rPr>
-                <a:solidFill>
-                  <a:srgbClr val="003B4F"/>
-                </a:solidFill>
-                <a:latin typeface="Courier"/>
-              </a:rPr>
-              <a:t>, </a:t>
-            </a:r>
-            <a:r>
-              <a:rPr>
-                <a:solidFill>
-                  <a:srgbClr val="20794D"/>
-                </a:solidFill>
-                <a:latin typeface="Courier"/>
-              </a:rPr>
-              <a:t>"Pr(&gt;F)"</a:t>
-            </a:r>
-            <a:r>
-              <a:rPr>
-                <a:solidFill>
-                  <a:srgbClr val="003B4F"/>
-                </a:solidFill>
-                <a:latin typeface="Courier"/>
-              </a:rPr>
-              <a:t>])</a:t>
             </a:r>
             <a:br/>
             <a:r>
